--- a/slides/pptx/lecture13_llms_landscape.pptx
+++ b/slides/pptx/lecture13_llms_landscape.pptx
@@ -30,6 +30,7 @@
     <p:sldId id="278" r:id="rId30"/>
     <p:sldId id="279" r:id="rId31"/>
     <p:sldId id="280" r:id="rId32"/>
+    <p:sldId id="281" r:id="rId33"/>
   </p:sldIdLst>
   <p:sldSz cx="12191695" cy="6858000" type="screen4x3"/>
   <p:notesSz cx="6858000" cy="9144000"/>
@@ -881,7 +882,7 @@
           <a:lstStyle/>
           <a:p>
             <a:r>
-              <a:t>The practical stop: how to actually put an LLM to work without training one. Three options, cheapest first. PROMPTING — just ask, putting your instructions and a few examples right in the prompt; best for general tasks with no private data, and it's instant. RAG (retrieval-augmented generation) — at query time, retrieve YOUR relevant documents (SOPs, records, papers) and paste them into the prompt so the model answers FROM them; best when answers must cite current or private material, and it's also the main hallucination guardrail from earlier. FINE-TUNING — further-train the model on your own labeled examples; reserve it for when you need a consistent new style or skill AND have many examples, because it's the most work. The worked clinical example: drafting a report that must quote TODAY's SOP → the SOP changes monthly, so you want RAG (pull the current SOP at query time), not fine-tuning (which would bake in a snapshot and need retraining every change). Next slide the room picks for a scenario (Quiz 13 Q3).</a:t>
+              <a:t>The practical stop: how to actually put an LLM to work without training one. Three options, cheapest first. PROMPTING — just ask, putting your instructions and a few examples right in the prompt; best for general tasks with no private data, and it's instant. RAG (retrieval-augmented generation) — at query time, retrieve YOUR relevant documents (SOPs, records, papers) and paste them into the prompt so the model answers FROM them; best when answers must cite current or private material, and it's also the main hallucination guardrail from earlier. FINE-TUNING — further-train the model on your own labeled examples; reserve it for when you need a consistent new style or skill AND have many examples, because it's the most work. The worked clinical example: drafting a report that must quote TODAY's SOP → the SOP changes monthly, so you want RAG (pull the current SOP at query time), not fine-tuning (which would bake in a snapshot and need retraining every change). Next slide opens up how RAG actually works, then the room picks for a scenario (Quiz 13 Q3).</a:t>
             </a:r>
           </a:p>
           <a:p/>
@@ -952,7 +953,7 @@
           <a:lstStyle/>
           <a:p>
             <a:r>
-              <a:t>YOU-DO = Quiz 13 Q3 (pick among prompting / RAG / fine-tuning and justify; assesses the "use an LLM without training one" outcome). Answer (identical to the Quiz 13 Q3 key): RAG. Why (any equivalent): the reports must cite the CURRENT calibration logs, which change weekly, so you retrieve the up-to-date log at query time and have the model answer from it — that keeps answers current and grounded (and cuts hallucination). Fine-tuning is wrong here because it would bake a stale snapshot into the weights and need re-training every month; plain prompting is wrong because you can't paste every log into every prompt and keep them current by hand. Note the bonus link: RAG is also the hallucination guardrail from Q4 — grounding answers in real documents. Take one answer with its reason, then have them fill Q3.</a:t>
+              <a:t>Open the RAG black box, because the room meets it as a guardrail (Q4) and a deployment choice (Q3). Five components, two phases. BUILD THE KNOWLEDGE BASE (offline, once): (1) CHUNKING — split your SOPs, logs, and papers into bite-sized passages so a retrieved piece is specific and fits in the prompt; (2) EMBEDDING — run each chunk through an embedding model that maps text to a vector positioned so passages with similar MEANING land near each other (the 'embedding = a point in space' idea from Lectures 7–8, now for whole passages, not tokens); (3) the VECTOR STORE / knowledge base — keep those chunk vectors indexed for fast lookup. ANSWER A QUESTION (online, every query): (4) RETRIEVAL — embed the question the same way and find the k nearest chunk vectors by similarity (cosine / dot-product 'closeness', the same score attention uses; approximate-nearest-neighbour indexes make this instant over millions of chunks); (5) GENERATION — paste the retrieved chunks plus the question into the prompt and let the LLM answer grounded in them, ideally citing the source chunk. Anchor to say aloud: ask 'today's cortisol calibration?' and the retriever returns the cortisol calibration-log chunk because its embedding is nearest — so the model answers from the CURRENT log, not memory. That grounding is exactly why RAG keeps answers current (Q3) and curbs hallucination (Q4). Honest limits: retrieval quality is everything (bad chunks → bad answer), and chunking / embedding choices matter. Next slide the room picks when to use each option.</a:t>
             </a:r>
           </a:p>
           <a:p/>
@@ -1023,7 +1024,7 @@
           <a:lstStyle/>
           <a:p>
             <a:r>
-              <a:t>The payoff of the whole course. Five landmark tools from mass spectrometry and structural biology, each on one slide in the SAME frame: the PROBLEM it solves, the ARCHITECTURE it uses — which is one you now know from Lectures 5–11 — and its IMPACT. The through-line to keep saying out loud: these are not exotic new inventions; they are the transformer, the CNN, and the attention mechanism you already understand, pointed at our data. As we go, the room is collecting the answers for the Q1 match (tool → problem → architecture), which we do live at the end of the tour. 💬 Keep the outcomes' pair prompt in your pocket: which of these is closest to a problem in your lab?</a:t>
+              <a:t>YOU-DO = Quiz 13 Q3 (pick among prompting / RAG / fine-tuning and justify — and note the answer is DIFFERENT from the I-do's RAG example, so it forces a real discrimination, not a pattern-match). Answer (identical to the Quiz 13 Q3 key): FINE-TUNING. Why (any equivalent): you want a consistent new STYLE applied every time and you have MANY labeled examples (2,000 past reports) — exactly the 'consistent new style/skill + many examples' row of the chart, so bake the style into the weights by fine-tuning. RAG is wrong here because the task isn't retrieving changing FACTS (the report content varies but the STYLE is fixed); plain prompting is wrong because a few in-prompt examples won't reliably enforce one house style across every report. Contrast the I-do (a report that must quote today's SOP → RAG, because THAT was about changing facts). Take one answer with its reason, then have them fill Q3.</a:t>
             </a:r>
           </a:p>
           <a:p/>
@@ -1094,7 +1095,7 @@
           <a:lstStyle/>
           <a:p>
             <a:r>
-              <a:t>Tour stop one, and the cleanest callback. De novo peptide sequencing means reading the amino-acid sequence straight from an MS/MS fragmentation spectrum WITHOUT matching to a database. Casanovo (and its ancestor DeepNovo) frames this as TRANSLATION: the spectrum is the "source sentence," the peptide is the "target sentence," and a transformer encoder–decoder — the very architecture we assembled in Lecture 8, reading each peak as a token (Lecture 7/8's peak-as-token) — translates one into the other. Impact: because it doesn't need a reference database, it can identify peptides that databases miss — novel variants, mutations, and immunopeptides — which is exactly where database search fails. Say the frame aloud: problem (de novo sequencing) → architecture you now know (transformer/translation) → impact (reads peptides no database contains).</a:t>
+              <a:t>The payoff of the whole course. Five landmark tools from mass spectrometry and structural biology, each on one slide in the SAME frame: the PROBLEM it solves, the ARCHITECTURE it uses — which is one you now know from Lectures 5–11 — and its IMPACT. The through-line to keep saying out loud: these are not exotic new inventions; they are the transformer, the CNN, and the attention mechanism you already understand, pointed at our data. As we go, the room is collecting the answers for the Q1 match (tool → problem → architecture), which we do live at the end of the tour. 💬 Keep the outcomes' pair prompt in your pocket: which of these is closest to a problem in your lab?</a:t>
             </a:r>
           </a:p>
           <a:p/>
@@ -1165,7 +1166,7 @@
           <a:lstStyle/>
           <a:p>
             <a:r>
-              <a:t>Stop two runs the arrow the other way: given a peptide SEQUENCE, predict what its fragment spectrum and retention time SHOULD look like. Prosit does this with a deep sequence model — an RNN/LSTM with attention (Lecture 7) — and AlphaPeptDeep with a transformer (Lecture 8); either way it's the sequence-model machinery you know. Why predict a spectrum you could just measure? Because comparing the observed spectrum to the PREDICTED one is a powerful extra score: it RESCORES database search hits, promoting real identifications and rejecting false ones, so you get more confident IDs at the same FDR. The same predicted-library idea underpins DIA analysis (next stop). Frame: problem (predict spectrum + RT) → architecture you know (deep sequence model, RNN/attention) → impact (rescore → more, better IDs).</a:t>
+              <a:t>Tour stop one, and the cleanest callback. De novo peptide sequencing means reading the amino-acid sequence straight from an MS/MS fragmentation spectrum WITHOUT matching to a database. Casanovo (and its ancestor DeepNovo) frames this as TRANSLATION: the spectrum is the "source sentence," the peptide is the "target sentence," and a transformer encoder–decoder — the very architecture we assembled in Lecture 8, reading each peak as a token (Lecture 7/8's peak-as-token) — translates one into the other. Impact: because it doesn't need a reference database, it can identify peptides that databases miss — novel variants, mutations, and immunopeptides — which is exactly where database search fails. Say the frame aloud: problem (de novo sequencing) → architecture you now know (transformer/translation) → impact (reads peptides no database contains).</a:t>
             </a:r>
           </a:p>
           <a:p/>
@@ -1236,7 +1237,7 @@
           <a:lstStyle/>
           <a:p>
             <a:r>
-              <a:t>Stop three, and a quick mid-tour interactive beat (keeps the ~8–10 min cadence): before you reveal the middle band, ask the room to PREDICT which architecture family this is from the problem alone — then reveal the MLP. Data-independent acquisition (DIA) fragments wide m/z windows, so a single spectrum is a jumble of many co-eluting peptides — powerful for throughput and reproducibility, but hard to deconvolve. DIA-NN ("DIA neural networks") uses deep neural networks — feed-forward classifiers, the plain MLPs from Lectures 1–4 — to score whether each candidate precursor is genuinely present amid the overlap, and to separate signal from noise. Impact: it made DIA robust and routine at scale, quantifying thousands of proteins per run with high reproducibility, which is why it's a workhorse in modern proteomics cores. Frame: problem (ID + quantify in overlapping DIA runs) → architecture you know (feed-forward MLP) → impact (robust, high-throughput proteomics). Note the teaching point: the "simplest" architecture in the course is behind one of the field's biggest tools — match the model to the job, not to the hype.</a:t>
+              <a:t>Stop two runs the arrow the other way: given a peptide SEQUENCE, predict what its fragment spectrum and retention time SHOULD look like. Prosit does this with a deep sequence model — an RNN/LSTM with attention (Lecture 7) — and AlphaPeptDeep with a transformer (Lecture 8); either way it's the sequence-model machinery you know. Why predict a spectrum you could just measure? Because comparing the observed spectrum to the PREDICTED one is a powerful extra score: it RESCORES database search hits, promoting real identifications and rejecting false ones, so you get more confident IDs at the same FDR. The same predicted-library idea underpins DIA analysis (next stop). Frame: problem (predict spectrum + RT) → architecture you know (deep sequence model, RNN/attention) → impact (rescore → more, better IDs).</a:t>
             </a:r>
           </a:p>
           <a:p/>
@@ -1378,7 +1379,7 @@
           <a:lstStyle/>
           <a:p>
             <a:r>
-              <a:t>Stop four is the clinical one, and it's the Lab 2 problem. (DRIAMS itself is the public dataset/benchmark behind these resistance-calling models; we frame it here as the 1D-CNN spectrum classifier you built in Lab 2.) Clinical microbiology labs already run MALDI-TOF on every isolate to identify the organism; DRIAMS asks whether the SAME spectrum also predicts ANTIBIOTIC RESISTANCE (resistant vs. susceptible) — a call that normally takes an extra day of culture. Framed as a 1D spectrum classification, this is the 1D CNN from Lecture 5 (the same peak-detector-slid-along-m/z idea we built in Lab 2). Impact: a potential resistance readout hours earlier, from data the lab is already collecting at no extra bench cost — a real, deployed-in-clinic style win. Be honest, tying to Lecture 10: these models can lose accuracy across sites and over time (the DRIAMS distribution-shift cautionary tale), so external and temporal validation is mandatory before trusting a call. Frame: problem (R/S from MALDI-TOF) → architecture you know (1D CNN) → impact (faster calls from routine data).</a:t>
+              <a:t>Stop three, and a quick mid-tour interactive beat (keeps the ~8–10 min cadence): before you reveal the middle band, ask the room to PREDICT which architecture family this is from the problem alone — then reveal the MLP. Data-independent acquisition (DIA) fragments wide m/z windows, so a single spectrum is a jumble of many co-eluting peptides — powerful for throughput and reproducibility, but hard to deconvolve. DIA-NN ("DIA neural networks") uses deep neural networks — feed-forward classifiers, the plain MLPs from Lectures 1–4 — to score whether each candidate precursor is genuinely present amid the overlap, and to separate signal from noise. Impact: it made DIA robust and routine at scale, quantifying thousands of proteins per run with high reproducibility, which is why it's a workhorse in modern proteomics cores. Frame: problem (ID + quantify in overlapping DIA runs) → architecture you know (feed-forward MLP) → impact (robust, high-throughput proteomics). Note the teaching point: the "simplest" architecture in the course is behind one of the field's biggest tools — match the model to the job, not to the hype.</a:t>
             </a:r>
           </a:p>
           <a:p/>
@@ -1449,7 +1450,7 @@
           <a:lstStyle/>
           <a:p>
             <a:r>
-              <a:t>The flagship, and the same frame. PROBLEM: predict a protein's 3D structure from its amino-acid sequence — the decades-old "protein folding problem." ARCHITECTURE: at its heart AlphaFold is attention — a specialized transformer (the "Evoformer") reasoning over the sequence and its evolutionary relatives — the exact mechanism from Lectures 7–8. IMPACT: it reached near-experimental accuracy in the CASP assessment and DeepMind has since released 200M+ predicted structures, reshaping structural biology and drug discovery; it's the single most famous "deep learning changed a science" result, and its authors shared a 2024 Nobel Prize. The message to leave the room with: the architecture that folds proteins is the same attention you now understand — pointed at sequences and scaled up. This is a reused, properly-licensed course image, credited in the caption. Frame: problem → architecture you know (attention/transformer) → impact (flagship).</a:t>
+              <a:t>Stop four is the clinical one, and it's the Lab 2 problem. (DRIAMS itself is the public dataset/benchmark behind these resistance-calling models; we frame it here as the 1D-CNN spectrum classifier you built in Lab 2.) Clinical microbiology labs already run MALDI-TOF on every isolate to identify the organism; DRIAMS asks whether the SAME spectrum also predicts ANTIBIOTIC RESISTANCE (resistant vs. susceptible) — a call that normally takes an extra day of culture. Framed as a 1D spectrum classification, this is the 1D CNN from Lecture 5 (the same peak-detector-slid-along-m/z idea we built in Lab 2). Impact: a potential resistance readout hours earlier, from data the lab is already collecting at no extra bench cost — a real, deployed-in-clinic style win. Be honest, tying to Lecture 10: these models can lose accuracy across sites and over time (the DRIAMS distribution-shift cautionary tale), so external and temporal validation is mandatory before trusting a call. Frame: problem (R/S from MALDI-TOF) → architecture you know (1D CNN) → impact (faster calls from routine data).</a:t>
             </a:r>
           </a:p>
           <a:p/>
@@ -1520,7 +1521,7 @@
           <a:lstStyle/>
           <a:p>
             <a:r>
-              <a:t>The whole tour on one page — the single chart the Q1 match is answerable from (rule 3). Walk the five rows once more by architecture family so the pattern lands: Casanovo = Transformer used as translation (Lecture 8); Prosit = a deep sequence model, RNN/LSTM + attention (Lecture 7); DIA-NN = a feed-forward MLP (Lectures 1–4); DRIAMS = a 1D CNN spectrum classifier (Lecture 5); AlphaFold = attention / transformer (Lectures 7–8). Every one is an architecture the room now owns, aimed at a real problem, with a concrete impact. Run the outcomes' 💬 pair prompt here: which of these five is closest to a problem in your own lab, and which architecture would it use? Harvest two or three, then the room does the formal match next slide (Quiz 13 Q1).</a:t>
+              <a:t>The flagship, and the same frame. PROBLEM: predict a protein's 3D structure from its amino-acid sequence — the decades-old "protein folding problem." ARCHITECTURE: at its heart AlphaFold is attention — a specialized transformer (the "Evoformer") reasoning over the sequence and its evolutionary relatives — the exact mechanism from Lectures 7–8. IMPACT: it reached near-experimental accuracy in the CASP assessment and DeepMind has since released 200M+ predicted structures, reshaping structural biology and drug discovery; it's the single most famous "deep learning changed a science" result, and its authors shared a 2024 Nobel Prize. The message to leave the room with: the architecture that folds proteins is the same attention you now understand — pointed at sequences and scaled up. This is a reused, properly-licensed course image, credited in the caption. Frame: problem → architecture you know (attention/transformer) → impact (flagship).</a:t>
             </a:r>
           </a:p>
           <a:p/>
@@ -1591,7 +1592,7 @@
           <a:lstStyle/>
           <a:p>
             <a:r>
-              <a:t>YOU-DO = Quiz 13 Q1 (match each landmark tool to its problem and its architecture family; assesses the landscape outcome). Answers (identical to the Quiz 13 Q1 key): Casanovo → de novo peptide sequencing → Transformer (translation). Prosit → predict fragment spectrum + retention time → deep sequence model (RNN/attention). DIA-NN → identify &amp; quantify in DIA runs → feed-forward neural net (MLP). DRIAMS → antibiotic resistance (R/S) from MALDI-TOF → 1D CNN (spectrum classifier). AlphaFold → 3D protein structure from sequence → Transformer / attention. Every problem and architecture was shown on its tour slide moments ago, so the room answers straight off the chart. Take one full row from the floor, then have them complete Q1 — that's all four Quiz 13 items worked live.</a:t>
+              <a:t>The whole tour on one page — the single chart the Q1 match is answerable from (rule 3). Walk the five rows once more by architecture family so the pattern lands: Casanovo = Transformer used as translation (Lecture 8); Prosit = a deep sequence model, RNN/LSTM + attention (Lecture 7); DIA-NN = a feed-forward MLP (Lectures 1–4); DRIAMS = a 1D CNN spectrum classifier (Lecture 5); AlphaFold = attention / transformer (Lectures 7–8). Every one is an architecture the room now owns, aimed at a real problem, with a concrete impact. Run the outcomes' 💬 pair prompt here: which of these five is closest to a problem in your own lab, and which architecture would it use? Harvest two or three, then the room does the formal match next slide (Quiz 13 Q1).</a:t>
             </a:r>
           </a:p>
           <a:p/>
@@ -1662,7 +1663,7 @@
           <a:lstStyle/>
           <a:p>
             <a:r>
-              <a:t>Recap = the Lecture 13 outcomes, each already a you-do this hour tied to a Quiz 13 item: the LLM pipeline + hallucination guardrail (Q4), the RL loop labeled on a lab scenario (Q2), the prompting/RAG/fine-tuning choice (Q3), and the five-tool match (Q1). The sheet was filled across the hour, not as an end block — a distributed worksheet. The big takeaway to send them off with: the frontier is not a different field. LLMs are next-token predictors trained in three stages; the landmark MS/biology tools are the same transformers, CNNs, and attention you now understand, pointed at our data. Keep the sheet — Lecture 14 makes an LLM into an agent that uses tools.</a:t>
+              <a:t>YOU-DO = Quiz 13 Q1 (upgraded from matching the five names to TRANSFERRING the problem→architecture map onto tools you've never seen — the real landscape skill). Answers: (a) a spectrum-in → one-label-out classifier is a 1D CNN, most like DRIAMS (same architecture, a species call instead of R/S). (b) sequence-in → predicted spectrum + RT is a deep SEQUENCE MODEL (RNN/attention or transformer), most like Prosit. (c) Casanovo (spectrum → peptide) and AlphaFold (sequence → 3D fold) both use a TRANSFORMER / ATTENTION; what their problems share is LONG-RANGE dependencies across a sequence — distant peaks/residues must inform each other, exactly what attention captures (a CNN sees only local windows). Every answer is reachable from the tour chart on the previous slide, but the room has to REASON, not recall. Take one full answer, then have them complete Q1 — that's all four Quiz 13 items worked live.</a:t>
             </a:r>
           </a:p>
           <a:p/>
@@ -1733,6 +1734,77 @@
           <a:lstStyle/>
           <a:p>
             <a:r>
+              <a:t>Recap = the Lecture 13 outcomes, each already a you-do this hour tied to a Quiz 13 item: the LLM pipeline + hallucination guardrail (Q4), the RL loop labeled on a lab scenario (Q2), the prompting/RAG/fine-tuning choice (Q3), and the five-tool match (Q1). The sheet was filled across the hour, not as an end block — a distributed worksheet. The big takeaway to send them off with: the frontier is not a different field. LLMs are next-token predictors trained in three stages; the landmark MS/biology tools are the same transformers, CNNs, and attention you now understand, pointed at our data. Keep the sheet — Lecture 14 makes an LLM into an agent that uses tools.</a:t>
+            </a:r>
+          </a:p>
+          <a:p/>
+        </p:txBody>
+      </p:sp>
+      <p:sp>
+        <p:nvSpPr>
+          <p:cNvPr id="4" name="Slide Number Placeholder 3"/>
+          <p:cNvSpPr>
+            <a:spLocks noGrp="1"/>
+          </p:cNvSpPr>
+          <p:nvPr>
+            <p:ph type="sldNum" idx="5" sz="quarter"/>
+          </p:nvPr>
+        </p:nvSpPr>
+        <p:spPr/>
+      </p:sp>
+    </p:spTree>
+  </p:cSld>
+  <p:clrMapOvr>
+    <a:masterClrMapping/>
+  </p:clrMapOvr>
+</p:notes>
+</file>
+
+<file path=ppt/notesSlides/notesSlide26.xml><?xml version="1.0" encoding="utf-8"?>
+<p:notes xmlns:a="http://schemas.openxmlformats.org/drawingml/2006/main" xmlns:p="http://schemas.openxmlformats.org/presentationml/2006/main" xmlns:r="http://schemas.openxmlformats.org/officeDocument/2006/relationships">
+  <p:cSld>
+    <p:spTree>
+      <p:nvGrpSpPr>
+        <p:cNvPr id="1" name=""/>
+        <p:cNvGrpSpPr/>
+        <p:nvPr/>
+      </p:nvGrpSpPr>
+      <p:grpSpPr>
+        <a:xfrm>
+          <a:off x="0" y="0"/>
+          <a:ext cx="0" cy="0"/>
+          <a:chOff x="0" y="0"/>
+          <a:chExt cx="0" cy="0"/>
+        </a:xfrm>
+      </p:grpSpPr>
+      <p:sp>
+        <p:nvSpPr>
+          <p:cNvPr id="2" name="Slide Image Placeholder 1"/>
+          <p:cNvSpPr>
+            <a:spLocks noGrp="1"/>
+          </p:cNvSpPr>
+          <p:nvPr>
+            <p:ph type="sldImg" idx="2"/>
+          </p:nvPr>
+        </p:nvSpPr>
+        <p:spPr/>
+      </p:sp>
+      <p:sp>
+        <p:nvSpPr>
+          <p:cNvPr id="3" name="Notes Placeholder 2"/>
+          <p:cNvSpPr>
+            <a:spLocks noGrp="1"/>
+          </p:cNvSpPr>
+          <p:nvPr>
+            <p:ph type="body" idx="3" sz="quarter"/>
+          </p:nvPr>
+        </p:nvSpPr>
+        <p:spPr/>
+        <p:txBody>
+          <a:bodyPr/>
+          <a:lstStyle/>
+          <a:p>
+            <a:r>
               <a:t>Hand the last minutes to finishing Quiz 13, then sell Lecture 14. The through-line: an AGENT is an LLM given tools and a reason→act loop (ReAct), and the two ideas from today carry straight over — reinforcement-style feedback is how such behaviors get shaped, and the hallucination guardrails (grounding, human review, restricted tools, logging) are exactly what keep an agent safe in a lab workflow. Next hour we go demo-driven: participants run a small reason→act→check exercise on their own free-tier chatbot, then watch a live "MS analysis assistant" read a QC CSV, plot it, flag anomalies, and draft a summary — each step narrated. Then Colab boots for the capstone and we mark Quiz 13 together.</a:t>
             </a:r>
           </a:p>
@@ -1804,7 +1876,7 @@
           <a:lstStyle/>
           <a:p>
             <a:r>
-              <a:t>Demystify the whole thing in one picture. A large language model is a next-token predictor: feed it the sequence of tokens so far (words, or here amino acids), and it returns a probability distribution over the entire vocabulary for what comes next; pick a token, append it, and repeat — that loop is how it writes a sentence or, for a protein language model, extends a peptide. The bars show the model favoring K (0.55) over R, G, and the long tail. Nothing here is magic — it is the softmax over scores we already know from Lecture 4 and used in attention (Lecture 7). Next slide we compute one of those probability sets by hand so "next-token prediction" is concrete, not a slogan.</a:t>
+              <a:t>Demystify the whole thing in one picture. A large language model is a next-token predictor: feed it the sequence of tokens so far (words, or here amino acids), and it returns a probability distribution over the entire vocabulary for what comes next; pick a token, append it, and repeat — that loop is how it writes a sentence or, for a protein language model, extends a peptide. The bars show the model favoring K (0.55) over R, G, and the long tail. Nothing here is magic — it is the softmax over scores we already know from Lecture 4 and used in attention (Lecture 7). Next slide we compute one of those probability sets by hand so "next-token prediction" is concrete, not a slogan. (This is also the decoder-only generation you met in Lecture 8 — and, as we foreshadowed there, an LLM is TRAINED on exactly this next-token game over a huge corpus.)</a:t>
             </a:r>
           </a:p>
           <a:p/>
@@ -2159,7 +2231,7 @@
           <a:lstStyle/>
           <a:p>
             <a:r>
-              <a:t>YOU-DO = Quiz 13 Q4 (name a hallucination risk and a guardrail; assesses the "design around the failure mode" outcome). Expected answer (any equivalent earns credit): (a) the model can invent a citation that does not exist — or fabricate/round a numeric result — while sounding completely confident, because it produces plausible tokens rather than checking a source; (b) a guardrail such as GROUNDING the draft in retrieved real documents (RAG) so every claim traces to a source, AND/OR requiring a human to verify every citation and number before the report is released. Extend it to their world: the same risk applies to auto-drafted method summaries, QC narratives, or literature reviews — never let unverified LLM text become the record. Take one answer from the floor, then have them fill Q4.</a:t>
+              <a:t>YOU-DO = Quiz 13 Q4 (SPOT the untrustworthy claims and explain the mechanism — not 'name the guardrail from the last slide'). (a) BOTH specifics must be verified: the NUMBER (48 nmol/L) and the CITATION (Nguyen et al., Clin. Chem. 2021). You cannot tell from the fluent wording whether either is real — any specific fact an LLM emits without a cited source is unverified by construction, so both are suspect. (b) Because the model is trained to produce PLAUSIBLE next tokens, not to check truth, a fabricated number or paper comes out with the same confidence as a real one. The lesson: treat every LLM-produced specific (number, citation, dose) as a draft to verify; the guardrails (ground in RAG'd sources, human sign-off) exist precisely because you can't trust fluency. Take one answer from the floor, then have them fill Q4.</a:t>
             </a:r>
           </a:p>
           <a:p/>
@@ -6389,7 +6461,7 @@
                 </a:solidFill>
                 <a:latin typeface="Menlo"/>
               </a:rPr>
-              <a:t>USING AN LLM · 1 OF 2 · THE THREE OPTIONS · I-DO</a:t>
+              <a:t>USING AN LLM · 1 OF 3 · THE THREE OPTIONS · I-DO</a:t>
             </a:r>
           </a:p>
         </p:txBody>
@@ -6607,7 +6679,7 @@
                 </a:solidFill>
                 <a:latin typeface="Menlo"/>
               </a:rPr>
-              <a:t>USING AN LLM · 2 OF 2 · YOUR TURN (YOU-DO = Q3)</a:t>
+              <a:t>USING AN LLM · 2 OF 3 · RAG, OPENED UP · I-DO</a:t>
             </a:r>
           </a:p>
         </p:txBody>
@@ -6621,7 +6693,7 @@
         <p:spPr>
           <a:xfrm>
             <a:off x="548640" y="731520"/>
-            <a:ext cx="11064240" cy="1005840"/>
+            <a:ext cx="11064240" cy="1127760"/>
           </a:xfrm>
           <a:prstGeom prst="rect">
             <a:avLst/>
@@ -6641,14 +6713,14 @@
                 </a:solidFill>
                 <a:latin typeface="Avenir Next"/>
               </a:rPr>
-              <a:t>Your turn — prompting, RAG, or fine-tuning?</a:t>
+              <a:t>Inside RAG: five parts turn your docs into grounded answers</a:t>
             </a:r>
           </a:p>
         </p:txBody>
       </p:sp>
       <p:pic>
         <p:nvPicPr>
-          <p:cNvPr id="5" name="Picture 4" descr="fig_use_llm_youdo.png"/>
+          <p:cNvPr id="5" name="Picture 4" descr="fig_rag_pipeline.png"/>
           <p:cNvPicPr>
             <a:picLocks noChangeAspect="1"/>
           </p:cNvPicPr>
@@ -6662,8 +6734,8 @@
         </p:blipFill>
         <p:spPr>
           <a:xfrm>
-            <a:off x="1557528" y="1828800"/>
-            <a:ext cx="9046464" cy="3877056"/>
+            <a:off x="2924387" y="1828800"/>
+            <a:ext cx="6312746" cy="2840736"/>
           </a:xfrm>
           <a:prstGeom prst="rect">
             <a:avLst/>
@@ -6678,18 +6750,18 @@
         </p:nvSpPr>
         <p:spPr>
           <a:xfrm>
-            <a:off x="548640" y="5797296"/>
-            <a:ext cx="10515600" cy="923544"/>
+            <a:off x="548640" y="4760976"/>
+            <a:ext cx="10515600" cy="1959864"/>
           </a:xfrm>
           <a:prstGeom prst="rect">
             <a:avLst/>
           </a:prstGeom>
           <a:solidFill>
-            <a:srgbClr val="F1F1EC"/>
+            <a:srgbClr val="E3F0EF"/>
           </a:solidFill>
           <a:ln w="12700">
             <a:solidFill>
-              <a:srgbClr val="E09E2F"/>
+              <a:srgbClr val="0E7C7B"/>
             </a:solidFill>
           </a:ln>
           <a:effectLst/>
@@ -6716,11 +6788,11 @@
             <a:r>
               <a:rPr sz="1200" b="1" i="0">
                 <a:solidFill>
-                  <a:srgbClr val="E09E2F"/>
+                  <a:srgbClr val="0E7C7B"/>
                 </a:solidFill>
                 <a:latin typeface="Menlo"/>
               </a:rPr>
-              <a:t>CHECKPOINT · </a:t>
+              <a:t>MASS SPEC · </a:t>
             </a:r>
             <a:r>
               <a:rPr sz="1700" b="0" i="0">
@@ -6729,7 +6801,7 @@
                 </a:solidFill>
                 <a:latin typeface="Avenir Next"/>
               </a:rPr>
-              <a:t>Your turn → Quiz 13, Q3. You want the assistant to answer questions from each instrument's CURRENT calibration log — updated every week. Prompting, RAG, or fine-tuning? In one sentence, why? Worked answer in the notes.</a:t>
+              <a:t>RAG is five parts, not magic. BUILD once: (1) CHUNK your documents into passages; (2) EMBED each chunk into a vector (meaning → a point in space, the embeddings of Lectures 7–8); (3) STORE them in a knowledge base. ANSWER each query: (4) embed the question and RETRIEVE the nearest chunks (a similarity search — attention's same dot-product 'closeness'); (5) GENERATE — the LLM answers FROM those chunks, with a citation. So 'today's cortisol calibration?' pulls the cortisol-log chunk — the model answers from the CURRENT log, not memory.</a:t>
             </a:r>
           </a:p>
         </p:txBody>
@@ -6825,7 +6897,7 @@
                 </a:solidFill>
                 <a:latin typeface="Menlo"/>
               </a:rPr>
-              <a:t>LECTURE 13 · PART FOUR</a:t>
+              <a:t>USING AN LLM · 3 OF 3 · YOUR TURN (YOU-DO = Q3)</a:t>
             </a:r>
           </a:p>
         </p:txBody>
@@ -6838,8 +6910,8 @@
         </p:nvSpPr>
         <p:spPr>
           <a:xfrm>
-            <a:off x="548640" y="2194560"/>
-            <a:ext cx="11064240" cy="2011680"/>
+            <a:off x="548640" y="731520"/>
+            <a:ext cx="11064240" cy="1005840"/>
           </a:xfrm>
           <a:prstGeom prst="rect">
             <a:avLst/>
@@ -6847,58 +6919,68 @@
           <a:noFill/>
         </p:spPr>
         <p:txBody>
-          <a:bodyPr wrap="square" anchor="ctr">
+          <a:bodyPr wrap="square" anchor="t">
             <a:spAutoFit/>
           </a:bodyPr>
           <a:lstStyle/>
           <a:p>
             <a:r>
-              <a:rPr sz="4400" b="1" i="0">
+              <a:rPr sz="3400" b="1" i="0">
                 <a:solidFill>
                   <a:srgbClr val="1B2025"/>
                 </a:solidFill>
                 <a:latin typeface="Avenir Next"/>
               </a:rPr>
-              <a:t>The landscape tour</a:t>
-            </a:r>
-          </a:p>
-          <a:p>
-            <a:pPr>
-              <a:spcBef>
-                <a:spcPts val="1600"/>
-              </a:spcBef>
-            </a:pPr>
-            <a:r>
-              <a:rPr sz="2200" b="0" i="0">
-                <a:solidFill>
-                  <a:srgbClr val="0E7C7B"/>
-                </a:solidFill>
-                <a:latin typeface="Avenir Next"/>
-              </a:rPr>
-              <a:t>five landmark MS / biology tools, each in one frame: problem → the architecture you now know → impact</a:t>
-            </a:r>
-          </a:p>
-        </p:txBody>
-      </p:sp>
-      <p:sp>
-        <p:nvSpPr>
-          <p:cNvPr id="5" name="Rectangle 4"/>
+              <a:t>Your turn — prompting, RAG, or fine-tuning?</a:t>
+            </a:r>
+          </a:p>
+        </p:txBody>
+      </p:sp>
+      <p:pic>
+        <p:nvPicPr>
+          <p:cNvPr id="5" name="Picture 4" descr="fig_use_llm_youdo.png"/>
+          <p:cNvPicPr>
+            <a:picLocks noChangeAspect="1"/>
+          </p:cNvPicPr>
+          <p:nvPr/>
+        </p:nvPicPr>
+        <p:blipFill>
+          <a:blip r:embed="rId2"/>
+          <a:stretch>
+            <a:fillRect/>
+          </a:stretch>
+        </p:blipFill>
+        <p:spPr>
+          <a:xfrm>
+            <a:off x="1859788" y="1828800"/>
+            <a:ext cx="8441944" cy="3617976"/>
+          </a:xfrm>
+          <a:prstGeom prst="rect">
+            <a:avLst/>
+          </a:prstGeom>
+        </p:spPr>
+      </p:pic>
+      <p:sp>
+        <p:nvSpPr>
+          <p:cNvPr id="6" name="Rectangle 5"/>
           <p:cNvSpPr/>
           <p:nvPr/>
         </p:nvSpPr>
         <p:spPr>
           <a:xfrm>
-            <a:off x="548640" y="2057400"/>
-            <a:ext cx="1280160" cy="54864"/>
+            <a:off x="548640" y="5538216"/>
+            <a:ext cx="10515600" cy="1182624"/>
           </a:xfrm>
           <a:prstGeom prst="rect">
             <a:avLst/>
           </a:prstGeom>
           <a:solidFill>
-            <a:srgbClr val="E09E2F"/>
+            <a:srgbClr val="F1F1EC"/>
           </a:solidFill>
-          <a:ln>
-            <a:noFill/>
+          <a:ln w="12700">
+            <a:solidFill>
+              <a:srgbClr val="E09E2F"/>
+            </a:solidFill>
           </a:ln>
           <a:effectLst/>
         </p:spPr>
@@ -6917,10 +6999,28 @@
           </a:fontRef>
         </p:style>
         <p:txBody>
-          <a:bodyPr rtlCol="0" anchor="ctr"/>
+          <a:bodyPr rtlCol="0" anchor="ctr" wrap="square" lIns="182880" rIns="182880"/>
           <a:lstStyle/>
           <a:p>
             <a:pPr algn="ctr"/>
+            <a:r>
+              <a:rPr sz="1200" b="1" i="0">
+                <a:solidFill>
+                  <a:srgbClr val="E09E2F"/>
+                </a:solidFill>
+                <a:latin typeface="Menlo"/>
+              </a:rPr>
+              <a:t>CHECKPOINT · </a:t>
+            </a:r>
+            <a:r>
+              <a:rPr sz="1700" b="0" i="0">
+                <a:solidFill>
+                  <a:srgbClr val="3D444C"/>
+                </a:solidFill>
+                <a:latin typeface="Avenir Next"/>
+              </a:rPr>
+              <a:t>Your turn → Quiz 13, Q3. You want the assistant to ALWAYS format results in your lab's exact report STYLE — same structure every time — and you have 2,000 past reports as examples. Prompting, RAG, or fine-tuning? In one sentence, why? Worked answer in the notes.</a:t>
+            </a:r>
           </a:p>
         </p:txBody>
       </p:sp>
@@ -7015,7 +7115,7 @@
                 </a:solidFill>
                 <a:latin typeface="Menlo"/>
               </a:rPr>
-              <a:t>TOUR · 1 OF 5 · DE NOVO SEQUENCING</a:t>
+              <a:t>LECTURE 13 · PART FOUR</a:t>
             </a:r>
           </a:p>
         </p:txBody>
@@ -7028,8 +7128,8 @@
         </p:nvSpPr>
         <p:spPr>
           <a:xfrm>
-            <a:off x="548640" y="731520"/>
-            <a:ext cx="11064240" cy="1127760"/>
+            <a:off x="548640" y="2194560"/>
+            <a:ext cx="11064240" cy="2011680"/>
           </a:xfrm>
           <a:prstGeom prst="rect">
             <a:avLst/>
@@ -7037,68 +7137,58 @@
           <a:noFill/>
         </p:spPr>
         <p:txBody>
-          <a:bodyPr wrap="square" anchor="t">
+          <a:bodyPr wrap="square" anchor="ctr">
             <a:spAutoFit/>
           </a:bodyPr>
           <a:lstStyle/>
           <a:p>
             <a:r>
-              <a:rPr sz="3400" b="1" i="0">
+              <a:rPr sz="4400" b="1" i="0">
                 <a:solidFill>
                   <a:srgbClr val="1B2025"/>
                 </a:solidFill>
                 <a:latin typeface="Avenir Next"/>
               </a:rPr>
-              <a:t>Casanovo / DeepNovo — sequencing without a database</a:t>
-            </a:r>
-          </a:p>
-        </p:txBody>
-      </p:sp>
-      <p:pic>
-        <p:nvPicPr>
-          <p:cNvPr id="5" name="Picture 4" descr="fig_land_casanovo.png"/>
-          <p:cNvPicPr>
-            <a:picLocks noChangeAspect="1"/>
-          </p:cNvPicPr>
-          <p:nvPr/>
-        </p:nvPicPr>
-        <p:blipFill>
-          <a:blip r:embed="rId2"/>
-          <a:stretch>
-            <a:fillRect/>
-          </a:stretch>
-        </p:blipFill>
-        <p:spPr>
-          <a:xfrm>
-            <a:off x="1524666" y="1828800"/>
-            <a:ext cx="9112188" cy="3617976"/>
-          </a:xfrm>
-          <a:prstGeom prst="rect">
-            <a:avLst/>
-          </a:prstGeom>
-        </p:spPr>
-      </p:pic>
-      <p:sp>
-        <p:nvSpPr>
-          <p:cNvPr id="6" name="Rectangle 5"/>
+              <a:t>The landscape tour</a:t>
+            </a:r>
+          </a:p>
+          <a:p>
+            <a:pPr>
+              <a:spcBef>
+                <a:spcPts val="1600"/>
+              </a:spcBef>
+            </a:pPr>
+            <a:r>
+              <a:rPr sz="2200" b="0" i="0">
+                <a:solidFill>
+                  <a:srgbClr val="0E7C7B"/>
+                </a:solidFill>
+                <a:latin typeface="Avenir Next"/>
+              </a:rPr>
+              <a:t>five landmark MS / biology tools, each in one frame: problem → the architecture you now know → impact</a:t>
+            </a:r>
+          </a:p>
+        </p:txBody>
+      </p:sp>
+      <p:sp>
+        <p:nvSpPr>
+          <p:cNvPr id="5" name="Rectangle 4"/>
           <p:cNvSpPr/>
           <p:nvPr/>
         </p:nvSpPr>
         <p:spPr>
           <a:xfrm>
-            <a:off x="548640" y="5538216"/>
-            <a:ext cx="10515600" cy="1182624"/>
+            <a:off x="548640" y="2057400"/>
+            <a:ext cx="1280160" cy="54864"/>
           </a:xfrm>
           <a:prstGeom prst="rect">
             <a:avLst/>
           </a:prstGeom>
           <a:solidFill>
-            <a:srgbClr val="E3F0EF"/>
+            <a:srgbClr val="E09E2F"/>
           </a:solidFill>
-          <a:ln w="12700">
-            <a:solidFill>
-              <a:srgbClr val="0E7C7B"/>
-            </a:solidFill>
+          <a:ln>
+            <a:noFill/>
           </a:ln>
           <a:effectLst/>
         </p:spPr>
@@ -7117,28 +7207,10 @@
           </a:fontRef>
         </p:style>
         <p:txBody>
-          <a:bodyPr rtlCol="0" anchor="ctr" wrap="square" lIns="182880" rIns="182880"/>
+          <a:bodyPr rtlCol="0" anchor="ctr"/>
           <a:lstStyle/>
           <a:p>
             <a:pPr algn="ctr"/>
-            <a:r>
-              <a:rPr sz="1200" b="1" i="0">
-                <a:solidFill>
-                  <a:srgbClr val="0E7C7B"/>
-                </a:solidFill>
-                <a:latin typeface="Menlo"/>
-              </a:rPr>
-              <a:t>MASS SPEC · </a:t>
-            </a:r>
-            <a:r>
-              <a:rPr sz="1700" b="0" i="0">
-                <a:solidFill>
-                  <a:srgbClr val="3D444C"/>
-                </a:solidFill>
-                <a:latin typeface="Avenir Next"/>
-              </a:rPr>
-              <a:t>Problem → architecture you know → impact. A TRANSFORMER reads an MS/MS spectrum and writes out the peptide — spectrum-in, peptide-out, exactly the translation setup from Lectures 7–8 with each peak as a token. It can name peptides that are in NO database: novel, mutated, immunopeptides.</a:t>
-            </a:r>
           </a:p>
         </p:txBody>
       </p:sp>
@@ -7233,7 +7305,7 @@
                 </a:solidFill>
                 <a:latin typeface="Menlo"/>
               </a:rPr>
-              <a:t>TOUR · 2 OF 5 · SPECTRUM / RT PREDICTION</a:t>
+              <a:t>TOUR · 1 OF 5 · DE NOVO SEQUENCING</a:t>
             </a:r>
           </a:p>
         </p:txBody>
@@ -7267,14 +7339,14 @@
                 </a:solidFill>
                 <a:latin typeface="Avenir Next"/>
               </a:rPr>
-              <a:t>Prosit / AlphaPeptDeep — predicting spectra to rescore IDs</a:t>
+              <a:t>Casanovo / DeepNovo — sequencing without a database</a:t>
             </a:r>
           </a:p>
         </p:txBody>
       </p:sp>
       <p:pic>
         <p:nvPicPr>
-          <p:cNvPr id="5" name="Picture 4" descr="fig_land_prosit.png"/>
+          <p:cNvPr id="5" name="Picture 4" descr="fig_land_casanovo.png"/>
           <p:cNvPicPr>
             <a:picLocks noChangeAspect="1"/>
           </p:cNvPicPr>
@@ -7355,7 +7427,7 @@
                 </a:solidFill>
                 <a:latin typeface="Avenir Next"/>
               </a:rPr>
-              <a:t>Problem → architecture you know → impact. A deep SEQUENCE MODEL (RNN/LSTM + attention; AlphaPeptDeep uses a transformer) predicts a peptide's fragment spectrum and retention time from its sequence. The predicted spectra RESCORE database hits → more confident IDs, and they build DIA libraries.</a:t>
+              <a:t>Problem → architecture you know → impact. A TRANSFORMER reads an MS/MS spectrum and writes out the peptide — spectrum-in, peptide-out, exactly the translation setup from Lectures 7–8 with each peak as a token. It can name peptides that are in NO database: novel, mutated, immunopeptides.</a:t>
             </a:r>
           </a:p>
         </p:txBody>
@@ -7451,7 +7523,7 @@
                 </a:solidFill>
                 <a:latin typeface="Menlo"/>
               </a:rPr>
-              <a:t>TOUR · 3 OF 5 · DIA ANALYSIS · 💬 PREDICT</a:t>
+              <a:t>TOUR · 2 OF 5 · SPECTRUM / RT PREDICTION</a:t>
             </a:r>
           </a:p>
         </p:txBody>
@@ -7485,14 +7557,14 @@
                 </a:solidFill>
                 <a:latin typeface="Avenir Next"/>
               </a:rPr>
-              <a:t>DIA-NN — untangling data-independent acquisition</a:t>
+              <a:t>Prosit / AlphaPeptDeep — predicting spectra to rescore IDs</a:t>
             </a:r>
           </a:p>
         </p:txBody>
       </p:sp>
       <p:pic>
         <p:nvPicPr>
-          <p:cNvPr id="5" name="Picture 4" descr="fig_land_diann.png"/>
+          <p:cNvPr id="5" name="Picture 4" descr="fig_land_prosit.png"/>
           <p:cNvPicPr>
             <a:picLocks noChangeAspect="1"/>
           </p:cNvPicPr>
@@ -7573,7 +7645,7 @@
                 </a:solidFill>
                 <a:latin typeface="Avenir Next"/>
               </a:rPr>
-              <a:t>💬 Predict the architecture before I reveal it. In DIA runs many peptides fragment at once, so signals overlap. DIA-NN uses FEED-FORWARD NEURAL NETS — the plain MLP classifiers from Lectures 1–4 — to score which precursors are really present. Impact: robust, high-throughput proteomics, thousands of proteins per run.</a:t>
+              <a:t>Problem → architecture you know → impact. A deep SEQUENCE MODEL (RNN/LSTM + attention; AlphaPeptDeep uses a transformer) predicts a peptide's fragment spectrum and retention time from its sequence. The predicted spectra RESCORE database hits → more confident IDs, and they build DIA libraries.</a:t>
             </a:r>
           </a:p>
         </p:txBody>
@@ -7760,7 +7832,7 @@
                 </a:solidFill>
                 <a:latin typeface="Menlo"/>
               </a:rPr>
-              <a:t>   · 16 min</a:t>
+              <a:t>   · 14 min</a:t>
             </a:r>
           </a:p>
           <a:p>
@@ -7819,7 +7891,7 @@
                 </a:solidFill>
                 <a:latin typeface="Avenir Next"/>
               </a:rPr>
-              <a:t>Using an LLM without training one — prompting vs RAG vs fine-tuning</a:t>
+              <a:t>Using an LLM without training one — prompting vs RAG (opened up) vs fine-tuning</a:t>
             </a:r>
             <a:r>
               <a:rPr sz="2100" b="0" i="0">
@@ -7828,7 +7900,7 @@
                 </a:solidFill>
                 <a:latin typeface="Menlo"/>
               </a:rPr>
-              <a:t>   · 8 min</a:t>
+              <a:t>   · 12 min</a:t>
             </a:r>
           </a:p>
           <a:p>
@@ -7862,7 +7934,7 @@
                 </a:solidFill>
                 <a:latin typeface="Menlo"/>
               </a:rPr>
-              <a:t>   · 18 min</a:t>
+              <a:t>   · 16 min</a:t>
             </a:r>
           </a:p>
         </p:txBody>
@@ -7958,7 +8030,7 @@
                 </a:solidFill>
                 <a:latin typeface="Menlo"/>
               </a:rPr>
-              <a:t>TOUR · 4 OF 5 · A CLINICAL WIN</a:t>
+              <a:t>TOUR · 3 OF 5 · DIA ANALYSIS · 💬 PREDICT</a:t>
             </a:r>
           </a:p>
         </p:txBody>
@@ -7972,7 +8044,7 @@
         <p:spPr>
           <a:xfrm>
             <a:off x="548640" y="731520"/>
-            <a:ext cx="11064240" cy="1005840"/>
+            <a:ext cx="11064240" cy="1127760"/>
           </a:xfrm>
           <a:prstGeom prst="rect">
             <a:avLst/>
@@ -7992,14 +8064,14 @@
                 </a:solidFill>
                 <a:latin typeface="Avenir Next"/>
               </a:rPr>
-              <a:t>DRIAMS — antibiotic resistance from MALDI-TOF</a:t>
+              <a:t>DIA-NN — untangling data-independent acquisition</a:t>
             </a:r>
           </a:p>
         </p:txBody>
       </p:sp>
       <p:pic>
         <p:nvPicPr>
-          <p:cNvPr id="5" name="Picture 4" descr="fig_land_driams.png"/>
+          <p:cNvPr id="5" name="Picture 4" descr="fig_land_diann.png"/>
           <p:cNvPicPr>
             <a:picLocks noChangeAspect="1"/>
           </p:cNvPicPr>
@@ -8080,7 +8152,7 @@
                 </a:solidFill>
                 <a:latin typeface="Avenir Next"/>
               </a:rPr>
-              <a:t>Problem → architecture you know → impact. Predict antibiotic resistance (R/S) directly from the routine clinical MALDI-TOF spectrum a lab already runs to ID the organism. Framed as a 1D-CNN spectrum classifier — the Lecture 5 model you built in Lab 2. Impact: faster resistance calls from data you already collect.</a:t>
+              <a:t>💬 Predict the architecture before I reveal it. In DIA runs many peptides fragment at once, so signals overlap. DIA-NN uses FEED-FORWARD NEURAL NETS — the plain MLP classifiers from Lectures 1–4 — to score which precursors are really present. Impact: robust, high-throughput proteomics, thousands of proteins per run.</a:t>
             </a:r>
           </a:p>
         </p:txBody>
@@ -8176,7 +8248,7 @@
                 </a:solidFill>
                 <a:latin typeface="Menlo"/>
               </a:rPr>
-              <a:t>TOUR · 5 OF 5 · THE FLAGSHIP</a:t>
+              <a:t>TOUR · 4 OF 5 · A CLINICAL WIN</a:t>
             </a:r>
           </a:p>
         </p:txBody>
@@ -8210,14 +8282,14 @@
                 </a:solidFill>
                 <a:latin typeface="Avenir Next"/>
               </a:rPr>
-              <a:t>AlphaFold — protein structure from sequence</a:t>
+              <a:t>DRIAMS — antibiotic resistance from MALDI-TOF</a:t>
             </a:r>
           </a:p>
         </p:txBody>
       </p:sp>
       <p:pic>
         <p:nvPicPr>
-          <p:cNvPr id="5" name="Picture 4" descr="alphafold_protein.png"/>
+          <p:cNvPr id="5" name="Picture 4" descr="fig_land_driams.png"/>
           <p:cNvPicPr>
             <a:picLocks noChangeAspect="1"/>
           </p:cNvPicPr>
@@ -8231,8 +8303,8 @@
         </p:blipFill>
         <p:spPr>
           <a:xfrm>
-            <a:off x="4619650" y="1828800"/>
-            <a:ext cx="2922219" cy="3115056"/>
+            <a:off x="1524666" y="1828800"/>
+            <a:ext cx="9112188" cy="3617976"/>
           </a:xfrm>
           <a:prstGeom prst="rect">
             <a:avLst/>
@@ -8241,48 +8313,13 @@
       </p:pic>
       <p:sp>
         <p:nvSpPr>
-          <p:cNvPr id="6" name="TextBox 5"/>
-          <p:cNvSpPr txBox="1"/>
-          <p:nvPr/>
-        </p:nvSpPr>
-        <p:spPr>
-          <a:xfrm>
-            <a:off x="548640" y="4998720"/>
-            <a:ext cx="11064240" cy="411480"/>
-          </a:xfrm>
-          <a:prstGeom prst="rect">
-            <a:avLst/>
-          </a:prstGeom>
-          <a:noFill/>
-        </p:spPr>
-        <p:txBody>
-          <a:bodyPr wrap="square" anchor="t">
-            <a:spAutoFit/>
-          </a:bodyPr>
-          <a:lstStyle/>
-          <a:p>
-            <a:pPr algn="ctr"/>
-            <a:r>
-              <a:rPr sz="1200" b="0" i="1">
-                <a:solidFill>
-                  <a:srgbClr val="8A9099"/>
-                </a:solidFill>
-                <a:latin typeface="Avenir Next"/>
-              </a:rPr>
-              <a:t>AlphaFold-predicted protein structure · image: AlphaFold DB, CC0 (reused course asset)</a:t>
-            </a:r>
-          </a:p>
-        </p:txBody>
-      </p:sp>
-      <p:sp>
-        <p:nvSpPr>
-          <p:cNvPr id="7" name="Rectangle 6"/>
+          <p:cNvPr id="6" name="Rectangle 5"/>
           <p:cNvSpPr/>
           <p:nvPr/>
         </p:nvSpPr>
         <p:spPr>
           <a:xfrm>
-            <a:off x="548640" y="5501640"/>
+            <a:off x="548640" y="5538216"/>
             <a:ext cx="10515600" cy="1182624"/>
           </a:xfrm>
           <a:prstGeom prst="rect">
@@ -8333,7 +8370,7 @@
                 </a:solidFill>
                 <a:latin typeface="Avenir Next"/>
               </a:rPr>
-              <a:t>Problem → architecture you know → impact. PROBLEM: predict a protein's 3D structure from its amino-acid sequence. ARCHITECTURE: attention / a transformer (the Evoformer) — Lectures 7–8. IMPACT: near-experimental accuracy and 200M+ predicted structures — the flagship of deep learning in biology.</a:t>
+              <a:t>Problem → architecture you know → impact. Predict antibiotic resistance (R/S) directly from the routine clinical MALDI-TOF spectrum a lab already runs to ID the organism. Framed as a 1D-CNN spectrum classifier — the Lecture 5 model you built in Lab 2. Impact: faster resistance calls from data you already collect.</a:t>
             </a:r>
           </a:p>
         </p:txBody>
@@ -8429,7 +8466,7 @@
                 </a:solidFill>
                 <a:latin typeface="Menlo"/>
               </a:rPr>
-              <a:t>TOUR · THE WHOLE TOUR · I-DO · 💬 PAIR</a:t>
+              <a:t>TOUR · 5 OF 5 · THE FLAGSHIP</a:t>
             </a:r>
           </a:p>
         </p:txBody>
@@ -8463,14 +8500,14 @@
                 </a:solidFill>
                 <a:latin typeface="Avenir Next"/>
               </a:rPr>
-              <a:t>The tour on one page</a:t>
+              <a:t>AlphaFold — protein structure from sequence</a:t>
             </a:r>
           </a:p>
         </p:txBody>
       </p:sp>
       <p:pic>
         <p:nvPicPr>
-          <p:cNvPr id="5" name="Picture 4" descr="fig_landscape_match_ido.png"/>
+          <p:cNvPr id="5" name="Picture 4" descr="alphafold_protein.png"/>
           <p:cNvPicPr>
             <a:picLocks noChangeAspect="1"/>
           </p:cNvPicPr>
@@ -8484,8 +8521,8 @@
         </p:blipFill>
         <p:spPr>
           <a:xfrm>
-            <a:off x="2399680" y="1828800"/>
-            <a:ext cx="7362160" cy="3617976"/>
+            <a:off x="4619650" y="1828800"/>
+            <a:ext cx="2922219" cy="3115056"/>
           </a:xfrm>
           <a:prstGeom prst="rect">
             <a:avLst/>
@@ -8494,13 +8531,48 @@
       </p:pic>
       <p:sp>
         <p:nvSpPr>
-          <p:cNvPr id="6" name="Rectangle 5"/>
+          <p:cNvPr id="6" name="TextBox 5"/>
+          <p:cNvSpPr txBox="1"/>
+          <p:nvPr/>
+        </p:nvSpPr>
+        <p:spPr>
+          <a:xfrm>
+            <a:off x="548640" y="4998720"/>
+            <a:ext cx="11064240" cy="411480"/>
+          </a:xfrm>
+          <a:prstGeom prst="rect">
+            <a:avLst/>
+          </a:prstGeom>
+          <a:noFill/>
+        </p:spPr>
+        <p:txBody>
+          <a:bodyPr wrap="square" anchor="t">
+            <a:spAutoFit/>
+          </a:bodyPr>
+          <a:lstStyle/>
+          <a:p>
+            <a:pPr algn="ctr"/>
+            <a:r>
+              <a:rPr sz="1200" b="0" i="1">
+                <a:solidFill>
+                  <a:srgbClr val="8A9099"/>
+                </a:solidFill>
+                <a:latin typeface="Avenir Next"/>
+              </a:rPr>
+              <a:t>AlphaFold-predicted protein structure · image: AlphaFold DB, CC0 (reused course asset)</a:t>
+            </a:r>
+          </a:p>
+        </p:txBody>
+      </p:sp>
+      <p:sp>
+        <p:nvSpPr>
+          <p:cNvPr id="7" name="Rectangle 6"/>
           <p:cNvSpPr/>
           <p:nvPr/>
         </p:nvSpPr>
         <p:spPr>
           <a:xfrm>
-            <a:off x="548640" y="5538216"/>
+            <a:off x="548640" y="5501640"/>
             <a:ext cx="10515600" cy="1182624"/>
           </a:xfrm>
           <a:prstGeom prst="rect">
@@ -8551,7 +8623,7 @@
                 </a:solidFill>
                 <a:latin typeface="Avenir Next"/>
               </a:rPr>
-              <a:t>Five tools, one frame. Casanovo → de novo sequencing → Transformer (translation). Prosit → predict spectrum+RT → sequence model (RNN/attn). DIA-NN → DIA ID+quant → MLP. DRIAMS → resistance from MALDI-TOF → 1D CNN. AlphaFold → protein structure → Transformer/attention. 💬 Which is closest to a problem in YOUR lab?</a:t>
+              <a:t>Problem → architecture you know → impact. PROBLEM: predict a protein's 3D structure from its amino-acid sequence. ARCHITECTURE: attention / a transformer (the Evoformer) — Lectures 7–8. IMPACT: near-experimental accuracy and 200M+ predicted structures — the flagship of deep learning in biology.</a:t>
             </a:r>
           </a:p>
         </p:txBody>
@@ -8647,7 +8719,7 @@
                 </a:solidFill>
                 <a:latin typeface="Menlo"/>
               </a:rPr>
-              <a:t>TOUR · YOUR TURN (YOU-DO = Q1)</a:t>
+              <a:t>TOUR · THE WHOLE TOUR · I-DO · 💬 PAIR</a:t>
             </a:r>
           </a:p>
         </p:txBody>
@@ -8661,7 +8733,7 @@
         <p:spPr>
           <a:xfrm>
             <a:off x="548640" y="731520"/>
-            <a:ext cx="11064240" cy="1127760"/>
+            <a:ext cx="11064240" cy="1005840"/>
           </a:xfrm>
           <a:prstGeom prst="rect">
             <a:avLst/>
@@ -8681,14 +8753,14 @@
                 </a:solidFill>
                 <a:latin typeface="Avenir Next"/>
               </a:rPr>
-              <a:t>Your turn — match tool → problem → architecture</a:t>
+              <a:t>The tour on one page</a:t>
             </a:r>
           </a:p>
         </p:txBody>
       </p:sp>
       <p:pic>
         <p:nvPicPr>
-          <p:cNvPr id="5" name="Picture 4" descr="fig_landscape_match_youdo.png"/>
+          <p:cNvPr id="5" name="Picture 4" descr="fig_landscape_match_ido.png"/>
           <p:cNvPicPr>
             <a:picLocks noChangeAspect="1"/>
           </p:cNvPicPr>
@@ -8702,8 +8774,8 @@
         </p:blipFill>
         <p:spPr>
           <a:xfrm>
-            <a:off x="2136081" y="1828800"/>
-            <a:ext cx="7889358" cy="3877056"/>
+            <a:off x="2399680" y="1828800"/>
+            <a:ext cx="7362160" cy="3617976"/>
           </a:xfrm>
           <a:prstGeom prst="rect">
             <a:avLst/>
@@ -8718,18 +8790,18 @@
         </p:nvSpPr>
         <p:spPr>
           <a:xfrm>
-            <a:off x="548640" y="5797296"/>
-            <a:ext cx="10515600" cy="923544"/>
+            <a:off x="548640" y="5538216"/>
+            <a:ext cx="10515600" cy="1182624"/>
           </a:xfrm>
           <a:prstGeom prst="rect">
             <a:avLst/>
           </a:prstGeom>
           <a:solidFill>
-            <a:srgbClr val="F1F1EC"/>
+            <a:srgbClr val="E3F0EF"/>
           </a:solidFill>
           <a:ln w="12700">
             <a:solidFill>
-              <a:srgbClr val="E09E2F"/>
+              <a:srgbClr val="0E7C7B"/>
             </a:solidFill>
           </a:ln>
           <a:effectLst/>
@@ -8756,11 +8828,11 @@
             <a:r>
               <a:rPr sz="1200" b="1" i="0">
                 <a:solidFill>
-                  <a:srgbClr val="E09E2F"/>
+                  <a:srgbClr val="0E7C7B"/>
                 </a:solidFill>
                 <a:latin typeface="Menlo"/>
               </a:rPr>
-              <a:t>CHECKPOINT · </a:t>
+              <a:t>MASS SPEC · </a:t>
             </a:r>
             <a:r>
               <a:rPr sz="1700" b="0" i="0">
@@ -8769,7 +8841,7 @@
                 </a:solidFill>
                 <a:latin typeface="Avenir Next"/>
               </a:rPr>
-              <a:t>Your turn → Quiz 13, Q1. For each tool — Casanovo, Prosit, DIA-NN, DRIAMS, AlphaFold — fill in its PROBLEM and its ARCHITECTURE FAMILY, using the two word banks. Worked answer in the notes.</a:t>
+              <a:t>Five tools, one frame. Casanovo → de novo sequencing → Transformer (translation). Prosit → predict spectrum+RT → sequence model (RNN/attn). DIA-NN → DIA ID+quant → MLP. DRIAMS → resistance from MALDI-TOF → 1D CNN. AlphaFold → protein structure → Transformer/attention. 💬 Which is closest to a problem in YOUR lab?</a:t>
             </a:r>
           </a:p>
         </p:txBody>
@@ -8865,7 +8937,7 @@
                 </a:solidFill>
                 <a:latin typeface="Menlo"/>
               </a:rPr>
-              <a:t>LECTURE 13 · WHAT YOU CAN DO NOW</a:t>
+              <a:t>TOUR · YOUR TURN (YOU-DO = Q1)</a:t>
             </a:r>
           </a:p>
         </p:txBody>
@@ -8899,134 +8971,35 @@
                 </a:solidFill>
                 <a:latin typeface="Avenir Next"/>
               </a:rPr>
-              <a:t>You can now…</a:t>
-            </a:r>
-          </a:p>
-        </p:txBody>
-      </p:sp>
-      <p:sp>
-        <p:nvSpPr>
-          <p:cNvPr id="5" name="TextBox 4"/>
-          <p:cNvSpPr txBox="1"/>
-          <p:nvPr/>
-        </p:nvSpPr>
-        <p:spPr>
-          <a:xfrm>
-            <a:off x="548640" y="1920240"/>
-            <a:ext cx="10789920" cy="3322320"/>
-          </a:xfrm>
-          <a:prstGeom prst="rect">
-            <a:avLst/>
-          </a:prstGeom>
-          <a:noFill/>
-        </p:spPr>
-        <p:txBody>
-          <a:bodyPr wrap="square" anchor="t">
-            <a:spAutoFit/>
-          </a:bodyPr>
-          <a:lstStyle/>
-          <a:p>
-            <a:pPr>
-              <a:spcAft>
-                <a:spcPts val="1800"/>
-              </a:spcAft>
-            </a:pPr>
-            <a:r>
-              <a:rPr sz="1900" b="1" i="0">
-                <a:solidFill>
-                  <a:srgbClr val="0E7C7B"/>
-                </a:solidFill>
-                <a:latin typeface="Avenir Next"/>
-              </a:rPr>
-              <a:t>•  </a:t>
-            </a:r>
-            <a:r>
-              <a:rPr sz="1900" b="0" i="0">
-                <a:solidFill>
-                  <a:srgbClr val="1B2025"/>
-                </a:solidFill>
-                <a:latin typeface="Avenir Next"/>
-              </a:rPr>
-              <a:t>Explain LLM training in pictures — next-token pretraining → SFT → preference tuning (RLHF) — and treat hallucination as a failure mode to design around (Quiz 13 Q4)</a:t>
-            </a:r>
-          </a:p>
-          <a:p>
-            <a:pPr>
-              <a:spcAft>
-                <a:spcPts val="1800"/>
-              </a:spcAft>
-            </a:pPr>
-            <a:r>
-              <a:rPr sz="1900" b="1" i="0">
-                <a:solidFill>
-                  <a:srgbClr val="0E7C7B"/>
-                </a:solidFill>
-                <a:latin typeface="Avenir Next"/>
-              </a:rPr>
-              <a:t>•  </a:t>
-            </a:r>
-            <a:r>
-              <a:rPr sz="1900" b="0" i="0">
-                <a:solidFill>
-                  <a:srgbClr val="1B2025"/>
-                </a:solidFill>
-                <a:latin typeface="Avenir Next"/>
-              </a:rPr>
-              <a:t>Describe reinforcement learning in one loop — agent, environment, action, reward — and label it on a lab scenario (Quiz 13 Q2)</a:t>
-            </a:r>
-          </a:p>
-          <a:p>
-            <a:pPr>
-              <a:spcAft>
-                <a:spcPts val="1800"/>
-              </a:spcAft>
-            </a:pPr>
-            <a:r>
-              <a:rPr sz="1900" b="1" i="0">
-                <a:solidFill>
-                  <a:srgbClr val="0E7C7B"/>
-                </a:solidFill>
-                <a:latin typeface="Avenir Next"/>
-              </a:rPr>
-              <a:t>•  </a:t>
-            </a:r>
-            <a:r>
-              <a:rPr sz="1900" b="0" i="0">
-                <a:solidFill>
-                  <a:srgbClr val="1B2025"/>
-                </a:solidFill>
-                <a:latin typeface="Avenir Next"/>
-              </a:rPr>
-              <a:t>Choose among prompting, RAG, and fine-tuning for a lab use case (Quiz 13 Q3)</a:t>
-            </a:r>
-          </a:p>
-          <a:p>
-            <a:pPr>
-              <a:spcAft>
-                <a:spcPts val="1800"/>
-              </a:spcAft>
-            </a:pPr>
-            <a:r>
-              <a:rPr sz="1900" b="1" i="0">
-                <a:solidFill>
-                  <a:srgbClr val="0E7C7B"/>
-                </a:solidFill>
-                <a:latin typeface="Avenir Next"/>
-              </a:rPr>
-              <a:t>•  </a:t>
-            </a:r>
-            <a:r>
-              <a:rPr sz="1900" b="0" i="0">
-                <a:solidFill>
-                  <a:srgbClr val="1B2025"/>
-                </a:solidFill>
-                <a:latin typeface="Avenir Next"/>
-              </a:rPr>
-              <a:t>For five landmark tools, name the problem, the architecture you now know, and the impact (Quiz 13 Q1)</a:t>
-            </a:r>
-          </a:p>
-        </p:txBody>
-      </p:sp>
+              <a:t>Your turn — place a tool you've never seen</a:t>
+            </a:r>
+          </a:p>
+        </p:txBody>
+      </p:sp>
+      <p:pic>
+        <p:nvPicPr>
+          <p:cNvPr id="5" name="Picture 4" descr="fig_landscape_transfer.png"/>
+          <p:cNvPicPr>
+            <a:picLocks noChangeAspect="1"/>
+          </p:cNvPicPr>
+          <p:nvPr/>
+        </p:nvPicPr>
+        <p:blipFill>
+          <a:blip r:embed="rId2"/>
+          <a:stretch>
+            <a:fillRect/>
+          </a:stretch>
+        </p:blipFill>
+        <p:spPr>
+          <a:xfrm>
+            <a:off x="2652843" y="1828800"/>
+            <a:ext cx="6855833" cy="3099816"/>
+          </a:xfrm>
+          <a:prstGeom prst="rect">
+            <a:avLst/>
+          </a:prstGeom>
+        </p:spPr>
+      </p:pic>
       <p:sp>
         <p:nvSpPr>
           <p:cNvPr id="6" name="Rectangle 5"/>
@@ -9035,8 +9008,8 @@
         </p:nvSpPr>
         <p:spPr>
           <a:xfrm>
-            <a:off x="548640" y="5379720"/>
-            <a:ext cx="10515600" cy="1182624"/>
+            <a:off x="548640" y="5020056"/>
+            <a:ext cx="10515600" cy="1700784"/>
           </a:xfrm>
           <a:prstGeom prst="rect">
             <a:avLst/>
@@ -9046,7 +9019,7 @@
           </a:solidFill>
           <a:ln w="12700">
             <a:solidFill>
-              <a:srgbClr val="3D444C"/>
+              <a:srgbClr val="E09E2F"/>
             </a:solidFill>
           </a:ln>
           <a:effectLst/>
@@ -9071,13 +9044,22 @@
           <a:p>
             <a:pPr algn="ctr"/>
             <a:r>
+              <a:rPr sz="1200" b="1" i="0">
+                <a:solidFill>
+                  <a:srgbClr val="E09E2F"/>
+                </a:solidFill>
+                <a:latin typeface="Menlo"/>
+              </a:rPr>
+              <a:t>CHECKPOINT · </a:t>
+            </a:r>
+            <a:r>
               <a:rPr sz="1700" b="0" i="0">
                 <a:solidFill>
                   <a:srgbClr val="3D444C"/>
                 </a:solidFill>
                 <a:latin typeface="Avenir Next"/>
               </a:rPr>
-              <a:t>You have now worked every item on Quiz 13 live — the hallucination guardrail (Q4), the RL labels (Q2), the prompting/RAG/fine-tuning choice (Q3), and the tool→problem→architecture match (Q1). Keep the sheet — Lecture 14 turns an LLM into an agent.</a:t>
+              <a:t>Your turn → Quiz 13, Q1. Not a match — a TRANSFER, using the five-tool map you just saw. (a) A tool calls bacterial SPECIES from a MALDI-TOF spectrum → which architecture family, most like which landmark? (b) A tool predicts a peptide's fragment spectrum + RT from its sequence → which family, like which landmark? (c) Casanovo and AlphaFold share ONE architecture family — which, and what do their problems have in common? Worked answer in the notes.</a:t>
             </a:r>
           </a:p>
         </p:txBody>
@@ -9173,6 +9155,314 @@
                 </a:solidFill>
                 <a:latin typeface="Menlo"/>
               </a:rPr>
+              <a:t>LECTURE 13 · WHAT YOU CAN DO NOW</a:t>
+            </a:r>
+          </a:p>
+        </p:txBody>
+      </p:sp>
+      <p:sp>
+        <p:nvSpPr>
+          <p:cNvPr id="4" name="TextBox 3"/>
+          <p:cNvSpPr txBox="1"/>
+          <p:nvPr/>
+        </p:nvSpPr>
+        <p:spPr>
+          <a:xfrm>
+            <a:off x="548640" y="731520"/>
+            <a:ext cx="11064240" cy="1005840"/>
+          </a:xfrm>
+          <a:prstGeom prst="rect">
+            <a:avLst/>
+          </a:prstGeom>
+          <a:noFill/>
+        </p:spPr>
+        <p:txBody>
+          <a:bodyPr wrap="square" anchor="t">
+            <a:spAutoFit/>
+          </a:bodyPr>
+          <a:lstStyle/>
+          <a:p>
+            <a:r>
+              <a:rPr sz="3400" b="1" i="0">
+                <a:solidFill>
+                  <a:srgbClr val="1B2025"/>
+                </a:solidFill>
+                <a:latin typeface="Avenir Next"/>
+              </a:rPr>
+              <a:t>You can now…</a:t>
+            </a:r>
+          </a:p>
+        </p:txBody>
+      </p:sp>
+      <p:sp>
+        <p:nvSpPr>
+          <p:cNvPr id="5" name="TextBox 4"/>
+          <p:cNvSpPr txBox="1"/>
+          <p:nvPr/>
+        </p:nvSpPr>
+        <p:spPr>
+          <a:xfrm>
+            <a:off x="548640" y="1920240"/>
+            <a:ext cx="10789920" cy="3611880"/>
+          </a:xfrm>
+          <a:prstGeom prst="rect">
+            <a:avLst/>
+          </a:prstGeom>
+          <a:noFill/>
+        </p:spPr>
+        <p:txBody>
+          <a:bodyPr wrap="square" anchor="t">
+            <a:spAutoFit/>
+          </a:bodyPr>
+          <a:lstStyle/>
+          <a:p>
+            <a:pPr>
+              <a:spcAft>
+                <a:spcPts val="1800"/>
+              </a:spcAft>
+            </a:pPr>
+            <a:r>
+              <a:rPr sz="1900" b="1" i="0">
+                <a:solidFill>
+                  <a:srgbClr val="0E7C7B"/>
+                </a:solidFill>
+                <a:latin typeface="Avenir Next"/>
+              </a:rPr>
+              <a:t>•  </a:t>
+            </a:r>
+            <a:r>
+              <a:rPr sz="1900" b="0" i="0">
+                <a:solidFill>
+                  <a:srgbClr val="1B2025"/>
+                </a:solidFill>
+                <a:latin typeface="Avenir Next"/>
+              </a:rPr>
+              <a:t>Explain LLM training in pictures — next-token pretraining → SFT → preference tuning (RLHF) — and spot which claims in an LLM answer you must verify (Quiz 13 Q4)</a:t>
+            </a:r>
+          </a:p>
+          <a:p>
+            <a:pPr>
+              <a:spcAft>
+                <a:spcPts val="1800"/>
+              </a:spcAft>
+            </a:pPr>
+            <a:r>
+              <a:rPr sz="1900" b="1" i="0">
+                <a:solidFill>
+                  <a:srgbClr val="0E7C7B"/>
+                </a:solidFill>
+                <a:latin typeface="Avenir Next"/>
+              </a:rPr>
+              <a:t>•  </a:t>
+            </a:r>
+            <a:r>
+              <a:rPr sz="1900" b="0" i="0">
+                <a:solidFill>
+                  <a:srgbClr val="1B2025"/>
+                </a:solidFill>
+                <a:latin typeface="Avenir Next"/>
+              </a:rPr>
+              <a:t>Describe reinforcement learning in one loop — agent, environment, action, reward — and label it on a lab scenario (Quiz 13 Q2)</a:t>
+            </a:r>
+          </a:p>
+          <a:p>
+            <a:pPr>
+              <a:spcAft>
+                <a:spcPts val="1800"/>
+              </a:spcAft>
+            </a:pPr>
+            <a:r>
+              <a:rPr sz="1900" b="1" i="0">
+                <a:solidFill>
+                  <a:srgbClr val="0E7C7B"/>
+                </a:solidFill>
+                <a:latin typeface="Avenir Next"/>
+              </a:rPr>
+              <a:t>•  </a:t>
+            </a:r>
+            <a:r>
+              <a:rPr sz="1900" b="0" i="0">
+                <a:solidFill>
+                  <a:srgbClr val="1B2025"/>
+                </a:solidFill>
+                <a:latin typeface="Avenir Next"/>
+              </a:rPr>
+              <a:t>Name the five parts of RAG, and choose among prompting, RAG, and fine-tuning — including when fine-tuning wins (Quiz 13 Q3)</a:t>
+            </a:r>
+          </a:p>
+          <a:p>
+            <a:pPr>
+              <a:spcAft>
+                <a:spcPts val="1800"/>
+              </a:spcAft>
+            </a:pPr>
+            <a:r>
+              <a:rPr sz="1900" b="1" i="0">
+                <a:solidFill>
+                  <a:srgbClr val="0E7C7B"/>
+                </a:solidFill>
+                <a:latin typeface="Avenir Next"/>
+              </a:rPr>
+              <a:t>•  </a:t>
+            </a:r>
+            <a:r>
+              <a:rPr sz="1900" b="0" i="0">
+                <a:solidFill>
+                  <a:srgbClr val="1B2025"/>
+                </a:solidFill>
+                <a:latin typeface="Avenir Next"/>
+              </a:rPr>
+              <a:t>Place a NEW tool you've never seen by its architecture family, and say why an architecture fits a problem (Quiz 13 Q1)</a:t>
+            </a:r>
+          </a:p>
+        </p:txBody>
+      </p:sp>
+      <p:sp>
+        <p:nvSpPr>
+          <p:cNvPr id="6" name="Rectangle 5"/>
+          <p:cNvSpPr/>
+          <p:nvPr/>
+        </p:nvSpPr>
+        <p:spPr>
+          <a:xfrm>
+            <a:off x="548640" y="5583936"/>
+            <a:ext cx="10515600" cy="1182624"/>
+          </a:xfrm>
+          <a:prstGeom prst="rect">
+            <a:avLst/>
+          </a:prstGeom>
+          <a:solidFill>
+            <a:srgbClr val="F1F1EC"/>
+          </a:solidFill>
+          <a:ln w="12700">
+            <a:solidFill>
+              <a:srgbClr val="3D444C"/>
+            </a:solidFill>
+          </a:ln>
+          <a:effectLst/>
+        </p:spPr>
+        <p:style>
+          <a:lnRef idx="1">
+            <a:schemeClr val="accent1"/>
+          </a:lnRef>
+          <a:fillRef idx="3">
+            <a:schemeClr val="accent1"/>
+          </a:fillRef>
+          <a:effectRef idx="2">
+            <a:schemeClr val="accent1"/>
+          </a:effectRef>
+          <a:fontRef idx="minor">
+            <a:schemeClr val="lt1"/>
+          </a:fontRef>
+        </p:style>
+        <p:txBody>
+          <a:bodyPr rtlCol="0" anchor="ctr" wrap="square" lIns="182880" rIns="182880"/>
+          <a:lstStyle/>
+          <a:p>
+            <a:pPr algn="ctr"/>
+            <a:r>
+              <a:rPr sz="1700" b="0" i="0">
+                <a:solidFill>
+                  <a:srgbClr val="3D444C"/>
+                </a:solidFill>
+                <a:latin typeface="Avenir Next"/>
+              </a:rPr>
+              <a:t>You have now worked every item on Quiz 13 live — spot the untrustworthy claim (Q4), the RL labels (Q2), the prompting/RAG/fine-tuning choice (Q3), and the place-a-new-tool transfer (Q1). Keep the sheet — Lecture 14 turns an LLM into an agent.</a:t>
+            </a:r>
+          </a:p>
+        </p:txBody>
+      </p:sp>
+    </p:spTree>
+  </p:cSld>
+  <p:clrMapOvr>
+    <a:masterClrMapping/>
+  </p:clrMapOvr>
+</p:sld>
+</file>
+
+<file path=ppt/slides/slide26.xml><?xml version="1.0" encoding="utf-8"?>
+<p:sld xmlns:a="http://schemas.openxmlformats.org/drawingml/2006/main" xmlns:p="http://schemas.openxmlformats.org/presentationml/2006/main" xmlns:r="http://schemas.openxmlformats.org/officeDocument/2006/relationships">
+  <p:cSld>
+    <p:spTree>
+      <p:nvGrpSpPr>
+        <p:cNvPr id="1" name=""/>
+        <p:cNvGrpSpPr/>
+        <p:nvPr/>
+      </p:nvGrpSpPr>
+      <p:grpSpPr/>
+      <p:sp>
+        <p:nvSpPr>
+          <p:cNvPr id="2" name="Rectangle 1"/>
+          <p:cNvSpPr/>
+          <p:nvPr/>
+        </p:nvSpPr>
+        <p:spPr>
+          <a:xfrm>
+            <a:off x="0" y="0"/>
+            <a:ext cx="12191695" cy="6858000"/>
+          </a:xfrm>
+          <a:prstGeom prst="rect">
+            <a:avLst/>
+          </a:prstGeom>
+          <a:solidFill>
+            <a:srgbClr val="FBFBF8"/>
+          </a:solidFill>
+          <a:ln>
+            <a:noFill/>
+          </a:ln>
+          <a:effectLst/>
+        </p:spPr>
+        <p:style>
+          <a:lnRef idx="1">
+            <a:schemeClr val="accent1"/>
+          </a:lnRef>
+          <a:fillRef idx="3">
+            <a:schemeClr val="accent1"/>
+          </a:fillRef>
+          <a:effectRef idx="2">
+            <a:schemeClr val="accent1"/>
+          </a:effectRef>
+          <a:fontRef idx="minor">
+            <a:schemeClr val="lt1"/>
+          </a:fontRef>
+        </p:style>
+        <p:txBody>
+          <a:bodyPr rtlCol="0" anchor="ctr"/>
+          <a:lstStyle/>
+          <a:p>
+            <a:pPr algn="ctr"/>
+          </a:p>
+        </p:txBody>
+      </p:sp>
+      <p:sp>
+        <p:nvSpPr>
+          <p:cNvPr id="3" name="TextBox 2"/>
+          <p:cNvSpPr txBox="1"/>
+          <p:nvPr/>
+        </p:nvSpPr>
+        <p:spPr>
+          <a:xfrm>
+            <a:off x="548640" y="320040"/>
+            <a:ext cx="10972800" cy="365760"/>
+          </a:xfrm>
+          <a:prstGeom prst="rect">
+            <a:avLst/>
+          </a:prstGeom>
+          <a:noFill/>
+        </p:spPr>
+        <p:txBody>
+          <a:bodyPr wrap="square" anchor="t">
+            <a:spAutoFit/>
+          </a:bodyPr>
+          <a:lstStyle/>
+          <a:p>
+            <a:r>
+              <a:rPr sz="1300" b="1" i="0">
+                <a:solidFill>
+                  <a:srgbClr val="8A9099"/>
+                </a:solidFill>
+                <a:latin typeface="Menlo"/>
+              </a:rPr>
               <a:t>LECTURE 13 · NEXT</a:t>
             </a:r>
           </a:p>
@@ -10596,7 +10886,7 @@
                 </a:solidFill>
                 <a:latin typeface="Avenir Next"/>
               </a:rPr>
-              <a:t>Your turn — where could it hallucinate, and what's the guardrail?</a:t>
+              <a:t>Your turn — which claims can't you trust, and why?</a:t>
             </a:r>
           </a:p>
         </p:txBody>
@@ -10684,7 +10974,7 @@
                 </a:solidFill>
                 <a:latin typeface="Avenir Next"/>
               </a:rPr>
-              <a:t>Your turn → Quiz 13, Q4. An LLM drafts a patient report and cites a reference to support a result. (a) Where could it hallucinate? (b) What ONE guardrail keeps it honest? Worked answer in the notes.</a:t>
+              <a:t>Your turn → Quiz 13, Q4. An LLM answers 'It's 48 nmol/L — see Nguyen et al., Clin. Chem. 2021.' (a) Which parts can you NOT trust without checking a source? (b) Why did the model state them so confidently? Worked answer in the notes.</a:t>
             </a:r>
           </a:p>
         </p:txBody>
